--- a/방학에 뭐하지_발표자료.pptx
+++ b/방학에 뭐하지_발표자료.pptx
@@ -5,13 +5,14 @@
     <p:sldMasterId id="2147483648" r:id="rId1"/>
   </p:sldMasterIdLst>
   <p:notesMasterIdLst>
-    <p:notesMasterId r:id="rId6"/>
+    <p:notesMasterId r:id="rId7"/>
   </p:notesMasterIdLst>
   <p:sldIdLst>
     <p:sldId id="256" r:id="rId2"/>
     <p:sldId id="257" r:id="rId3"/>
     <p:sldId id="258" r:id="rId4"/>
     <p:sldId id="259" r:id="rId5"/>
+    <p:sldId id="260" r:id="rId6"/>
   </p:sldIdLst>
   <p:sldSz cx="9144000" cy="5143500" type="screen16x9"/>
   <p:notesSz cx="5143500" cy="9144000"/>
@@ -576,6 +577,114 @@
 </p:notes>
 </file>
 
+<file path=ppt/notesSlides/notesSlide5.xml><?xml version="1.0" encoding="utf-8"?>
+<p:notes xmlns:a="http://schemas.openxmlformats.org/drawingml/2006/main" xmlns:r="http://schemas.openxmlformats.org/officeDocument/2006/relationships" xmlns:p="http://schemas.openxmlformats.org/presentationml/2006/main">
+  <p:cSld>
+    <p:spTree>
+      <p:nvGrpSpPr>
+        <p:cNvPr id="1" name="">
+          <a:extLst>
+            <a:ext uri="{FF2B5EF4-FFF2-40B4-BE49-F238E27FC236}">
+              <a16:creationId xmlns:a16="http://schemas.microsoft.com/office/drawing/2014/main" id="{2DA48758-BEDE-00B7-34FF-6058B8BD962F}"/>
+            </a:ext>
+          </a:extLst>
+        </p:cNvPr>
+        <p:cNvGrpSpPr/>
+        <p:nvPr/>
+      </p:nvGrpSpPr>
+      <p:grpSpPr>
+        <a:xfrm>
+          <a:off x="0" y="0"/>
+          <a:ext cx="0" cy="0"/>
+          <a:chOff x="0" y="0"/>
+          <a:chExt cx="0" cy="0"/>
+        </a:xfrm>
+      </p:grpSpPr>
+      <p:sp>
+        <p:nvSpPr>
+          <p:cNvPr id="2" name="Slide Image Placeholder 1">
+            <a:extLst>
+              <a:ext uri="{FF2B5EF4-FFF2-40B4-BE49-F238E27FC236}">
+                <a16:creationId xmlns:a16="http://schemas.microsoft.com/office/drawing/2014/main" id="{84BA78A7-3EFC-9259-EB62-8022086D710F}"/>
+              </a:ext>
+            </a:extLst>
+          </p:cNvPr>
+          <p:cNvSpPr>
+            <a:spLocks noGrp="1" noRot="1" noChangeAspect="1"/>
+          </p:cNvSpPr>
+          <p:nvPr>
+            <p:ph type="sldImg"/>
+          </p:nvPr>
+        </p:nvSpPr>
+        <p:spPr/>
+      </p:sp>
+      <p:sp>
+        <p:nvSpPr>
+          <p:cNvPr id="3" name="Notes Placeholder 2">
+            <a:extLst>
+              <a:ext uri="{FF2B5EF4-FFF2-40B4-BE49-F238E27FC236}">
+                <a16:creationId xmlns:a16="http://schemas.microsoft.com/office/drawing/2014/main" id="{E80B167F-3A55-2ABF-0DCC-621A285298A0}"/>
+              </a:ext>
+            </a:extLst>
+          </p:cNvPr>
+          <p:cNvSpPr>
+            <a:spLocks noGrp="1"/>
+          </p:cNvSpPr>
+          <p:nvPr>
+            <p:ph type="body" idx="1"/>
+          </p:nvPr>
+        </p:nvSpPr>
+        <p:spPr/>
+        <p:txBody>
+          <a:bodyPr/>
+          <a:lstStyle/>
+          <a:p>
+            <a:endParaRPr lang="en-US" dirty="0"/>
+          </a:p>
+        </p:txBody>
+      </p:sp>
+      <p:sp>
+        <p:nvSpPr>
+          <p:cNvPr id="4" name="Slide Number Placeholder 3">
+            <a:extLst>
+              <a:ext uri="{FF2B5EF4-FFF2-40B4-BE49-F238E27FC236}">
+                <a16:creationId xmlns:a16="http://schemas.microsoft.com/office/drawing/2014/main" id="{AA6CE286-60B7-21EB-A1CE-D3158DBAD7C1}"/>
+              </a:ext>
+            </a:extLst>
+          </p:cNvPr>
+          <p:cNvSpPr>
+            <a:spLocks noGrp="1"/>
+          </p:cNvSpPr>
+          <p:nvPr>
+            <p:ph type="sldNum" sz="quarter" idx="10"/>
+          </p:nvPr>
+        </p:nvSpPr>
+        <p:spPr/>
+        <p:txBody>
+          <a:bodyPr/>
+          <a:lstStyle/>
+          <a:p>
+            <a:fld id="{F7021451-1387-4CA6-816F-3879F97B5CBC}" type="slidenum">
+              <a:rPr lang="en-US"/>
+              <a:t>5</a:t>
+            </a:fld>
+            <a:endParaRPr lang="en-US"/>
+          </a:p>
+        </p:txBody>
+      </p:sp>
+    </p:spTree>
+    <p:extLst>
+      <p:ext uri="{BB962C8B-B14F-4D97-AF65-F5344CB8AC3E}">
+        <p14:creationId xmlns:p14="http://schemas.microsoft.com/office/powerpoint/2010/main" val="2456604180"/>
+      </p:ext>
+    </p:extLst>
+  </p:cSld>
+  <p:clrMapOvr>
+    <a:masterClrMapping/>
+  </p:clrMapOvr>
+</p:notes>
+</file>
+
 <file path=ppt/slideLayouts/slideLayout1.xml><?xml version="1.0" encoding="utf-8"?>
 <p:sldLayout xmlns:a="http://schemas.openxmlformats.org/drawingml/2006/main" xmlns:r="http://schemas.openxmlformats.org/officeDocument/2006/relationships" xmlns:p="http://schemas.openxmlformats.org/presentationml/2006/main" preserve="1">
   <p:cSld name="DEFAULT">
@@ -1568,11 +1677,7 @@
               <a:buNone/>
             </a:pPr>
             <a:r>
-              <a:rPr lang="en-US" sz="1400" dirty="0">
-                <a:solidFill>
-                  <a:srgbClr val="64748B"/>
-                </a:solidFill>
-              </a:rPr>
+              <a:rPr lang="en-US" sz="1400" dirty="0"/>
               <a:t>공모전은 링커리어, </a:t>
             </a:r>
           </a:p>
@@ -1584,22 +1689,13 @@
               <a:buNone/>
             </a:pPr>
             <a:r>
-              <a:rPr lang="en-US" sz="1400" dirty="0" err="1">
-                <a:solidFill>
-                  <a:srgbClr val="64748B"/>
-                </a:solidFill>
-              </a:rPr>
+              <a:rPr lang="en-US" sz="1400" dirty="0" err="1"/>
               <a:t>강의는</a:t>
             </a:r>
             <a:r>
-              <a:rPr lang="en-US" sz="1400" dirty="0">
-                <a:solidFill>
-                  <a:srgbClr val="64748B"/>
-                </a:solidFill>
-              </a:rPr>
+              <a:rPr lang="en-US" sz="1400" dirty="0"/>
               <a:t> 인프런,</a:t>
             </a:r>
-            <a:endParaRPr lang="en-US" sz="1400" dirty="0"/>
           </a:p>
           <a:p>
             <a:pPr marL="0" indent="0" algn="ctr">
@@ -1609,11 +1705,7 @@
               <a:buNone/>
             </a:pPr>
             <a:r>
-              <a:rPr lang="en-US" sz="1400" dirty="0">
-                <a:solidFill>
-                  <a:srgbClr val="64748B"/>
-                </a:solidFill>
-              </a:rPr>
+              <a:rPr lang="en-US" sz="1400" dirty="0"/>
               <a:t>인턴은 잡코리아… </a:t>
             </a:r>
           </a:p>
@@ -1625,14 +1717,9 @@
               <a:buNone/>
             </a:pPr>
             <a:r>
-              <a:rPr lang="en-US" sz="1400" dirty="0">
-                <a:solidFill>
-                  <a:srgbClr val="64748B"/>
-                </a:solidFill>
-              </a:rPr>
+              <a:rPr lang="en-US" sz="1400" dirty="0"/>
               <a:t>다 따로 찾아야 함</a:t>
             </a:r>
-            <a:endParaRPr lang="en-US" sz="1400" dirty="0"/>
           </a:p>
         </p:txBody>
       </p:sp>
@@ -1766,11 +1853,7 @@
               <a:buNone/>
             </a:pPr>
             <a:r>
-              <a:rPr lang="en-US" sz="1400" dirty="0">
-                <a:solidFill>
-                  <a:srgbClr val="64748B"/>
-                </a:solidFill>
-              </a:rPr>
+              <a:rPr lang="en-US" sz="1400" dirty="0"/>
               <a:t>수많은 정보 중 </a:t>
             </a:r>
           </a:p>
@@ -1782,14 +1865,9 @@
               <a:buNone/>
             </a:pPr>
             <a:r>
-              <a:rPr lang="en-US" sz="1400" dirty="0">
-                <a:solidFill>
-                  <a:srgbClr val="64748B"/>
-                </a:solidFill>
-              </a:rPr>
+              <a:rPr lang="en-US" sz="1400" dirty="0"/>
               <a:t>내 학년·직무에</a:t>
             </a:r>
-            <a:endParaRPr lang="en-US" sz="1400" dirty="0"/>
           </a:p>
           <a:p>
             <a:pPr marL="0" indent="0" algn="ctr">
@@ -1799,27 +1877,15 @@
               <a:buNone/>
             </a:pPr>
             <a:r>
-              <a:rPr lang="en-US" sz="1400" dirty="0">
-                <a:solidFill>
-                  <a:srgbClr val="64748B"/>
-                </a:solidFill>
-              </a:rPr>
+              <a:rPr lang="en-US" sz="1400" dirty="0"/>
               <a:t>맞는 것이 뭔지 </a:t>
             </a:r>
             <a:r>
-              <a:rPr lang="en-US" sz="1400" dirty="0" err="1">
-                <a:solidFill>
-                  <a:srgbClr val="64748B"/>
-                </a:solidFill>
-              </a:rPr>
+              <a:rPr lang="en-US" sz="1400" dirty="0" err="1"/>
               <a:t>판단하기</a:t>
             </a:r>
             <a:r>
-              <a:rPr lang="en-US" sz="1400" dirty="0">
-                <a:solidFill>
-                  <a:srgbClr val="64748B"/>
-                </a:solidFill>
-              </a:rPr>
+              <a:rPr lang="en-US" sz="1400" dirty="0"/>
               <a:t> </a:t>
             </a:r>
           </a:p>
@@ -1831,11 +1897,7 @@
               <a:buNone/>
             </a:pPr>
             <a:r>
-              <a:rPr lang="en-US" sz="1400" dirty="0" err="1">
-                <a:solidFill>
-                  <a:srgbClr val="64748B"/>
-                </a:solidFill>
-              </a:rPr>
+              <a:rPr lang="en-US" sz="1400" dirty="0" err="1"/>
               <a:t>어려움</a:t>
             </a:r>
             <a:endParaRPr lang="en-US" sz="1400" dirty="0"/>
@@ -1972,14 +2034,9 @@
               <a:buNone/>
             </a:pPr>
             <a:r>
-              <a:rPr lang="en-US" sz="1400" dirty="0">
-                <a:solidFill>
-                  <a:srgbClr val="64748B"/>
-                </a:solidFill>
-              </a:rPr>
+              <a:rPr lang="en-US" sz="1400" dirty="0"/>
               <a:t>뭘 해야 할지 고민하다</a:t>
             </a:r>
-            <a:endParaRPr lang="en-US" sz="1400" dirty="0"/>
           </a:p>
           <a:p>
             <a:pPr marL="0" indent="0" algn="ctr">
@@ -1989,14 +2046,9 @@
               <a:buNone/>
             </a:pPr>
             <a:r>
-              <a:rPr lang="en-US" sz="1400" dirty="0">
-                <a:solidFill>
-                  <a:srgbClr val="64748B"/>
-                </a:solidFill>
-              </a:rPr>
+              <a:rPr lang="en-US" sz="1400" dirty="0"/>
               <a:t>결국 아무것도 못 하는 방학</a:t>
             </a:r>
-            <a:endParaRPr lang="en-US" sz="1400" dirty="0"/>
           </a:p>
         </p:txBody>
       </p:sp>
@@ -4261,6 +4313,555 @@
         </p:txBody>
       </p:sp>
     </p:spTree>
+  </p:cSld>
+  <p:clrMapOvr>
+    <a:masterClrMapping/>
+  </p:clrMapOvr>
+</p:sld>
+</file>
+
+<file path=ppt/slides/slide5.xml><?xml version="1.0" encoding="utf-8"?>
+<p:sld xmlns:a="http://schemas.openxmlformats.org/drawingml/2006/main" xmlns:r="http://schemas.openxmlformats.org/officeDocument/2006/relationships" xmlns:p="http://schemas.openxmlformats.org/presentationml/2006/main">
+  <p:cSld>
+    <p:spTree>
+      <p:nvGrpSpPr>
+        <p:cNvPr id="1" name="">
+          <a:extLst>
+            <a:ext uri="{FF2B5EF4-FFF2-40B4-BE49-F238E27FC236}">
+              <a16:creationId xmlns:a16="http://schemas.microsoft.com/office/drawing/2014/main" id="{8DE0889C-2316-9AE2-C59F-F8D404A06290}"/>
+            </a:ext>
+          </a:extLst>
+        </p:cNvPr>
+        <p:cNvGrpSpPr/>
+        <p:nvPr/>
+      </p:nvGrpSpPr>
+      <p:grpSpPr>
+        <a:xfrm>
+          <a:off x="0" y="0"/>
+          <a:ext cx="0" cy="0"/>
+          <a:chOff x="0" y="0"/>
+          <a:chExt cx="0" cy="0"/>
+        </a:xfrm>
+      </p:grpSpPr>
+      <p:sp>
+        <p:nvSpPr>
+          <p:cNvPr id="2" name="Shape 0">
+            <a:extLst>
+              <a:ext uri="{FF2B5EF4-FFF2-40B4-BE49-F238E27FC236}">
+                <a16:creationId xmlns:a16="http://schemas.microsoft.com/office/drawing/2014/main" id="{138F3A2C-4D76-A102-51FC-7CBEB134E85D}"/>
+              </a:ext>
+            </a:extLst>
+          </p:cNvPr>
+          <p:cNvSpPr/>
+          <p:nvPr/>
+        </p:nvSpPr>
+        <p:spPr>
+          <a:xfrm>
+            <a:off x="0" y="0"/>
+            <a:ext cx="9144000" cy="73152"/>
+          </a:xfrm>
+          <a:prstGeom prst="rect">
+            <a:avLst/>
+          </a:prstGeom>
+          <a:solidFill>
+            <a:srgbClr val="5B6EF5"/>
+          </a:solidFill>
+          <a:ln/>
+        </p:spPr>
+        <p:txBody>
+          <a:bodyPr/>
+          <a:lstStyle/>
+          <a:p>
+            <a:endParaRPr lang="ko-KR" altLang="en-US"/>
+          </a:p>
+        </p:txBody>
+      </p:sp>
+      <p:sp>
+        <p:nvSpPr>
+          <p:cNvPr id="3" name="Text 1">
+            <a:extLst>
+              <a:ext uri="{FF2B5EF4-FFF2-40B4-BE49-F238E27FC236}">
+                <a16:creationId xmlns:a16="http://schemas.microsoft.com/office/drawing/2014/main" id="{BE158D08-F91A-5610-B33F-A6B8E40D7EBF}"/>
+              </a:ext>
+            </a:extLst>
+          </p:cNvPr>
+          <p:cNvSpPr/>
+          <p:nvPr/>
+        </p:nvSpPr>
+        <p:spPr>
+          <a:xfrm>
+            <a:off x="457200" y="228600"/>
+            <a:ext cx="640080" cy="411480"/>
+          </a:xfrm>
+          <a:prstGeom prst="rect">
+            <a:avLst/>
+          </a:prstGeom>
+          <a:noFill/>
+          <a:ln/>
+        </p:spPr>
+        <p:txBody>
+          <a:bodyPr wrap="square" rtlCol="0" anchor="ctr"/>
+          <a:lstStyle/>
+          <a:p>
+            <a:pPr marL="0" indent="0">
+              <a:buNone/>
+            </a:pPr>
+            <a:r>
+              <a:rPr lang="en-US" sz="2800" b="1" dirty="0">
+                <a:solidFill>
+                  <a:srgbClr val="E2E8F0"/>
+                </a:solidFill>
+                <a:latin typeface="Arial Black" pitchFamily="34" charset="0"/>
+                <a:ea typeface="Arial Black" pitchFamily="34" charset="-122"/>
+                <a:cs typeface="Arial Black" pitchFamily="34" charset="-120"/>
+              </a:rPr>
+              <a:t>04</a:t>
+            </a:r>
+            <a:endParaRPr lang="en-US" sz="2800" dirty="0"/>
+          </a:p>
+        </p:txBody>
+      </p:sp>
+      <p:sp>
+        <p:nvSpPr>
+          <p:cNvPr id="4" name="Text 2">
+            <a:extLst>
+              <a:ext uri="{FF2B5EF4-FFF2-40B4-BE49-F238E27FC236}">
+                <a16:creationId xmlns:a16="http://schemas.microsoft.com/office/drawing/2014/main" id="{F57CF09A-945B-B7AF-9771-C5D22D31A615}"/>
+              </a:ext>
+            </a:extLst>
+          </p:cNvPr>
+          <p:cNvSpPr/>
+          <p:nvPr/>
+        </p:nvSpPr>
+        <p:spPr>
+          <a:xfrm>
+            <a:off x="1188720" y="256032"/>
+            <a:ext cx="5486400" cy="365760"/>
+          </a:xfrm>
+          <a:prstGeom prst="rect">
+            <a:avLst/>
+          </a:prstGeom>
+          <a:noFill/>
+          <a:ln/>
+        </p:spPr>
+        <p:txBody>
+          <a:bodyPr wrap="square" rtlCol="0" anchor="ctr"/>
+          <a:lstStyle/>
+          <a:p>
+            <a:pPr marL="0" indent="0">
+              <a:buNone/>
+            </a:pPr>
+            <a:r>
+              <a:rPr lang="ko-KR" altLang="en-US" sz="2200" b="1" dirty="0">
+                <a:solidFill>
+                  <a:srgbClr val="1E1B4B"/>
+                </a:solidFill>
+              </a:rPr>
+              <a:t>수익 모델</a:t>
+            </a:r>
+            <a:endParaRPr lang="en-US" sz="2200" dirty="0"/>
+          </a:p>
+        </p:txBody>
+      </p:sp>
+      <p:sp>
+        <p:nvSpPr>
+          <p:cNvPr id="22" name="Shape 5">
+            <a:extLst>
+              <a:ext uri="{FF2B5EF4-FFF2-40B4-BE49-F238E27FC236}">
+                <a16:creationId xmlns:a16="http://schemas.microsoft.com/office/drawing/2014/main" id="{B6908A88-3AE2-AA3E-3DEF-28C69D6EF2D0}"/>
+              </a:ext>
+            </a:extLst>
+          </p:cNvPr>
+          <p:cNvSpPr/>
+          <p:nvPr/>
+        </p:nvSpPr>
+        <p:spPr>
+          <a:xfrm>
+            <a:off x="457199" y="907012"/>
+            <a:ext cx="3739351" cy="3586264"/>
+          </a:xfrm>
+          <a:prstGeom prst="rect">
+            <a:avLst/>
+          </a:prstGeom>
+          <a:solidFill>
+            <a:srgbClr val="FFFFFF"/>
+          </a:solidFill>
+          <a:ln w="12700">
+            <a:solidFill>
+              <a:srgbClr val="E2E8F0"/>
+            </a:solidFill>
+            <a:prstDash val="solid"/>
+          </a:ln>
+          <a:effectLst>
+            <a:outerShdw blurRad="101600" dist="25400" dir="8100000" algn="bl" rotWithShape="0">
+              <a:srgbClr val="000000">
+                <a:alpha val="10000"/>
+              </a:srgbClr>
+            </a:outerShdw>
+          </a:effectLst>
+        </p:spPr>
+        <p:txBody>
+          <a:bodyPr/>
+          <a:lstStyle/>
+          <a:p>
+            <a:endParaRPr lang="ko-KR" altLang="en-US"/>
+          </a:p>
+        </p:txBody>
+      </p:sp>
+      <p:sp>
+        <p:nvSpPr>
+          <p:cNvPr id="23" name="Shape 6">
+            <a:extLst>
+              <a:ext uri="{FF2B5EF4-FFF2-40B4-BE49-F238E27FC236}">
+                <a16:creationId xmlns:a16="http://schemas.microsoft.com/office/drawing/2014/main" id="{A227ACB8-313B-2752-37BE-0F75873E3712}"/>
+              </a:ext>
+            </a:extLst>
+          </p:cNvPr>
+          <p:cNvSpPr/>
+          <p:nvPr/>
+        </p:nvSpPr>
+        <p:spPr>
+          <a:xfrm>
+            <a:off x="457199" y="907011"/>
+            <a:ext cx="3739351" cy="65205"/>
+          </a:xfrm>
+          <a:prstGeom prst="rect">
+            <a:avLst/>
+          </a:prstGeom>
+          <a:solidFill>
+            <a:srgbClr val="5B6EF5"/>
+          </a:solidFill>
+          <a:ln/>
+        </p:spPr>
+        <p:txBody>
+          <a:bodyPr/>
+          <a:lstStyle/>
+          <a:p>
+            <a:endParaRPr lang="ko-KR" altLang="en-US"/>
+          </a:p>
+        </p:txBody>
+      </p:sp>
+      <p:sp>
+        <p:nvSpPr>
+          <p:cNvPr id="25" name="Text 8">
+            <a:extLst>
+              <a:ext uri="{FF2B5EF4-FFF2-40B4-BE49-F238E27FC236}">
+                <a16:creationId xmlns:a16="http://schemas.microsoft.com/office/drawing/2014/main" id="{0AFCF189-F769-1792-679A-425528C6E9A2}"/>
+              </a:ext>
+            </a:extLst>
+          </p:cNvPr>
+          <p:cNvSpPr/>
+          <p:nvPr/>
+        </p:nvSpPr>
+        <p:spPr>
+          <a:xfrm>
+            <a:off x="594360" y="1208764"/>
+            <a:ext cx="3352522" cy="489036"/>
+          </a:xfrm>
+          <a:prstGeom prst="rect">
+            <a:avLst/>
+          </a:prstGeom>
+          <a:noFill/>
+          <a:ln/>
+        </p:spPr>
+        <p:txBody>
+          <a:bodyPr wrap="square" rtlCol="0" anchor="ctr"/>
+          <a:lstStyle/>
+          <a:p>
+            <a:pPr marL="0" indent="0" algn="ctr">
+              <a:buNone/>
+            </a:pPr>
+            <a:r>
+              <a:rPr lang="ko-KR" altLang="en-US" sz="1500" b="1" dirty="0">
+                <a:solidFill>
+                  <a:srgbClr val="1E1B4B"/>
+                </a:solidFill>
+              </a:rPr>
+              <a:t>프리미엄 플랜</a:t>
+            </a:r>
+            <a:endParaRPr lang="en-US" sz="1500" dirty="0"/>
+          </a:p>
+        </p:txBody>
+      </p:sp>
+      <p:sp>
+        <p:nvSpPr>
+          <p:cNvPr id="26" name="Text 9">
+            <a:extLst>
+              <a:ext uri="{FF2B5EF4-FFF2-40B4-BE49-F238E27FC236}">
+                <a16:creationId xmlns:a16="http://schemas.microsoft.com/office/drawing/2014/main" id="{9D88F2E2-E073-9474-A83F-2604F7B9161E}"/>
+              </a:ext>
+            </a:extLst>
+          </p:cNvPr>
+          <p:cNvSpPr/>
+          <p:nvPr/>
+        </p:nvSpPr>
+        <p:spPr>
+          <a:xfrm>
+            <a:off x="844028" y="2144499"/>
+            <a:ext cx="3352522" cy="1684457"/>
+          </a:xfrm>
+          <a:prstGeom prst="rect">
+            <a:avLst/>
+          </a:prstGeom>
+          <a:noFill/>
+          <a:ln/>
+        </p:spPr>
+        <p:txBody>
+          <a:bodyPr wrap="square" rtlCol="0" anchor="ctr"/>
+          <a:lstStyle/>
+          <a:p>
+            <a:pPr marL="0" indent="0">
+              <a:lnSpc>
+                <a:spcPct val="140000"/>
+              </a:lnSpc>
+              <a:buNone/>
+            </a:pPr>
+            <a:r>
+              <a:rPr lang="ko-KR" altLang="en-US" sz="1400" dirty="0"/>
+              <a:t>프리미엄 사용자에게</a:t>
+            </a:r>
+            <a:endParaRPr lang="en-US" altLang="ko-KR" sz="1400" dirty="0"/>
+          </a:p>
+          <a:p>
+            <a:pPr marL="285750" indent="-285750">
+              <a:lnSpc>
+                <a:spcPct val="140000"/>
+              </a:lnSpc>
+              <a:buFont typeface="Arial" panose="020B0604020202020204" pitchFamily="34" charset="0"/>
+              <a:buChar char="•"/>
+            </a:pPr>
+            <a:r>
+              <a:rPr lang="ko-KR" altLang="en-US" sz="1400" dirty="0"/>
+              <a:t>요청 횟수 무제한</a:t>
+            </a:r>
+            <a:endParaRPr lang="en-US" altLang="ko-KR" sz="1400" dirty="0"/>
+          </a:p>
+          <a:p>
+            <a:pPr marL="285750" indent="-285750">
+              <a:lnSpc>
+                <a:spcPct val="140000"/>
+              </a:lnSpc>
+              <a:buFont typeface="Arial" panose="020B0604020202020204" pitchFamily="34" charset="0"/>
+              <a:buChar char="•"/>
+            </a:pPr>
+            <a:r>
+              <a:rPr lang="ko-KR" altLang="en-US" sz="1400" dirty="0"/>
+              <a:t>히스토리 관리</a:t>
+            </a:r>
+            <a:endParaRPr lang="en-US" altLang="ko-KR" sz="1400" dirty="0"/>
+          </a:p>
+          <a:p>
+            <a:pPr marL="285750" indent="-285750">
+              <a:lnSpc>
+                <a:spcPct val="140000"/>
+              </a:lnSpc>
+              <a:buFont typeface="Arial" panose="020B0604020202020204" pitchFamily="34" charset="0"/>
+              <a:buChar char="•"/>
+            </a:pPr>
+            <a:r>
+              <a:rPr lang="ko-KR" altLang="en-US" sz="1400" dirty="0"/>
+              <a:t>일정 맞춤 알림 메일 제공</a:t>
+            </a:r>
+            <a:endParaRPr lang="en-US" sz="1400" dirty="0"/>
+          </a:p>
+        </p:txBody>
+      </p:sp>
+      <p:sp>
+        <p:nvSpPr>
+          <p:cNvPr id="41" name="Shape 10">
+            <a:extLst>
+              <a:ext uri="{FF2B5EF4-FFF2-40B4-BE49-F238E27FC236}">
+                <a16:creationId xmlns:a16="http://schemas.microsoft.com/office/drawing/2014/main" id="{47E80EA2-4C0C-DFEA-0DDE-4E78CE3740A9}"/>
+              </a:ext>
+            </a:extLst>
+          </p:cNvPr>
+          <p:cNvSpPr/>
+          <p:nvPr/>
+        </p:nvSpPr>
+        <p:spPr>
+          <a:xfrm>
+            <a:off x="4947449" y="907011"/>
+            <a:ext cx="3739351" cy="3586265"/>
+          </a:xfrm>
+          <a:prstGeom prst="rect">
+            <a:avLst/>
+          </a:prstGeom>
+          <a:solidFill>
+            <a:srgbClr val="FFFFFF"/>
+          </a:solidFill>
+          <a:ln w="12700">
+            <a:solidFill>
+              <a:srgbClr val="E2E8F0"/>
+            </a:solidFill>
+            <a:prstDash val="solid"/>
+          </a:ln>
+          <a:effectLst>
+            <a:outerShdw blurRad="101600" dist="25400" dir="8100000" algn="bl" rotWithShape="0">
+              <a:srgbClr val="000000">
+                <a:alpha val="10000"/>
+              </a:srgbClr>
+            </a:outerShdw>
+          </a:effectLst>
+        </p:spPr>
+        <p:txBody>
+          <a:bodyPr/>
+          <a:lstStyle/>
+          <a:p>
+            <a:endParaRPr lang="ko-KR" altLang="en-US"/>
+          </a:p>
+        </p:txBody>
+      </p:sp>
+      <p:sp>
+        <p:nvSpPr>
+          <p:cNvPr id="42" name="Shape 11">
+            <a:extLst>
+              <a:ext uri="{FF2B5EF4-FFF2-40B4-BE49-F238E27FC236}">
+                <a16:creationId xmlns:a16="http://schemas.microsoft.com/office/drawing/2014/main" id="{CE7B0B8A-BE77-DD3A-20F6-74A5D550E928}"/>
+              </a:ext>
+            </a:extLst>
+          </p:cNvPr>
+          <p:cNvSpPr/>
+          <p:nvPr/>
+        </p:nvSpPr>
+        <p:spPr>
+          <a:xfrm>
+            <a:off x="4947449" y="907011"/>
+            <a:ext cx="3739351" cy="65205"/>
+          </a:xfrm>
+          <a:prstGeom prst="rect">
+            <a:avLst/>
+          </a:prstGeom>
+          <a:solidFill>
+            <a:srgbClr val="5B6EF5"/>
+          </a:solidFill>
+          <a:ln/>
+        </p:spPr>
+        <p:txBody>
+          <a:bodyPr/>
+          <a:lstStyle/>
+          <a:p>
+            <a:endParaRPr lang="ko-KR" altLang="en-US"/>
+          </a:p>
+        </p:txBody>
+      </p:sp>
+      <p:sp>
+        <p:nvSpPr>
+          <p:cNvPr id="43" name="Text 13">
+            <a:extLst>
+              <a:ext uri="{FF2B5EF4-FFF2-40B4-BE49-F238E27FC236}">
+                <a16:creationId xmlns:a16="http://schemas.microsoft.com/office/drawing/2014/main" id="{42A08B75-A283-2EDD-9542-15E5A639983D}"/>
+              </a:ext>
+            </a:extLst>
+          </p:cNvPr>
+          <p:cNvSpPr/>
+          <p:nvPr/>
+        </p:nvSpPr>
+        <p:spPr>
+          <a:xfrm>
+            <a:off x="5197118" y="1208764"/>
+            <a:ext cx="3352522" cy="489036"/>
+          </a:xfrm>
+          <a:prstGeom prst="rect">
+            <a:avLst/>
+          </a:prstGeom>
+          <a:noFill/>
+          <a:ln/>
+        </p:spPr>
+        <p:txBody>
+          <a:bodyPr wrap="square" rtlCol="0" anchor="ctr"/>
+          <a:lstStyle/>
+          <a:p>
+            <a:pPr marL="0" indent="0" algn="ctr">
+              <a:buNone/>
+            </a:pPr>
+            <a:r>
+              <a:rPr lang="ko-KR" altLang="en-US" sz="1500" b="1" dirty="0">
+                <a:solidFill>
+                  <a:srgbClr val="1E1B4B"/>
+                </a:solidFill>
+              </a:rPr>
+              <a:t>기업 연계 광고</a:t>
+            </a:r>
+            <a:endParaRPr lang="en-US" sz="1500" dirty="0"/>
+          </a:p>
+        </p:txBody>
+      </p:sp>
+      <p:sp>
+        <p:nvSpPr>
+          <p:cNvPr id="44" name="Text 14">
+            <a:extLst>
+              <a:ext uri="{FF2B5EF4-FFF2-40B4-BE49-F238E27FC236}">
+                <a16:creationId xmlns:a16="http://schemas.microsoft.com/office/drawing/2014/main" id="{21EBF986-F27C-7C91-CBEB-2F6B3EB7D663}"/>
+              </a:ext>
+            </a:extLst>
+          </p:cNvPr>
+          <p:cNvSpPr/>
+          <p:nvPr/>
+        </p:nvSpPr>
+        <p:spPr>
+          <a:xfrm>
+            <a:off x="5197118" y="2278612"/>
+            <a:ext cx="3352522" cy="1684458"/>
+          </a:xfrm>
+          <a:prstGeom prst="rect">
+            <a:avLst/>
+          </a:prstGeom>
+          <a:noFill/>
+          <a:ln/>
+        </p:spPr>
+        <p:txBody>
+          <a:bodyPr wrap="square" rtlCol="0" anchor="ctr"/>
+          <a:lstStyle/>
+          <a:p>
+            <a:pPr marL="0" indent="0">
+              <a:lnSpc>
+                <a:spcPct val="140000"/>
+              </a:lnSpc>
+              <a:buNone/>
+            </a:pPr>
+            <a:r>
+              <a:rPr lang="ko-KR" altLang="en-US" sz="1400" dirty="0"/>
+              <a:t>대외활동</a:t>
+            </a:r>
+            <a:r>
+              <a:rPr lang="en-US" altLang="ko-KR" sz="1400" dirty="0"/>
+              <a:t>, </a:t>
+            </a:r>
+            <a:r>
+              <a:rPr lang="ko-KR" altLang="en-US" sz="1400" dirty="0"/>
+              <a:t>공모전 공고 노출 부분에</a:t>
+            </a:r>
+            <a:endParaRPr lang="en-US" altLang="ko-KR" sz="1400" dirty="0"/>
+          </a:p>
+          <a:p>
+            <a:pPr marL="0" indent="0">
+              <a:lnSpc>
+                <a:spcPct val="140000"/>
+              </a:lnSpc>
+              <a:buNone/>
+            </a:pPr>
+            <a:r>
+              <a:rPr lang="ko-KR" altLang="en-US" sz="1400" dirty="0"/>
+              <a:t>기업의 채용프로그램</a:t>
+            </a:r>
+            <a:r>
+              <a:rPr lang="en-US" altLang="ko-KR" sz="1400" dirty="0"/>
+              <a:t>, </a:t>
+            </a:r>
+            <a:r>
+              <a:rPr lang="ko-KR" altLang="en-US" sz="1400" dirty="0"/>
+              <a:t>서포터즈 광고</a:t>
+            </a:r>
+            <a:endParaRPr lang="en-US" sz="1400" dirty="0"/>
+          </a:p>
+        </p:txBody>
+      </p:sp>
+    </p:spTree>
+    <p:extLst>
+      <p:ext uri="{BB962C8B-B14F-4D97-AF65-F5344CB8AC3E}">
+        <p14:creationId xmlns:p14="http://schemas.microsoft.com/office/powerpoint/2010/main" val="334043382"/>
+      </p:ext>
+    </p:extLst>
   </p:cSld>
   <p:clrMapOvr>
     <a:masterClrMapping/>
